--- a/slides for class/my slides/Aynchronous Programming.pptx
+++ b/slides for class/my slides/Aynchronous Programming.pptx
@@ -9577,11 +9577,7 @@
             </a:pPr>
             <a:r>
               <a:rPr lang="en-US" dirty="0"/>
-              <a:t>W</a:t>
-            </a:r>
-            <a:r>
-              <a:rPr lang="en" dirty="0" err="1"/>
-              <a:t>aits</a:t>
+              <a:t>Waits</a:t>
             </a:r>
             <a:r>
               <a:rPr lang="en" dirty="0"/>
